--- a/Reporte 061026.pptx
+++ b/Reporte 061026.pptx
@@ -5,7 +5,7 @@
     <p:sldMasterId id="2147483672" r:id="rId1"/>
   </p:sldMasterIdLst>
   <p:notesMasterIdLst>
-    <p:notesMasterId r:id="rId18"/>
+    <p:notesMasterId r:id="rId19"/>
   </p:notesMasterIdLst>
   <p:sldIdLst>
     <p:sldId id="350" r:id="rId2"/>
@@ -22,23 +22,24 @@
     <p:sldId id="361" r:id="rId13"/>
     <p:sldId id="412" r:id="rId14"/>
     <p:sldId id="371" r:id="rId15"/>
-    <p:sldId id="413" r:id="rId16"/>
-    <p:sldId id="280" r:id="rId17"/>
+    <p:sldId id="414" r:id="rId16"/>
+    <p:sldId id="413" r:id="rId17"/>
+    <p:sldId id="280" r:id="rId18"/>
   </p:sldIdLst>
   <p:sldSz cx="9144000" cy="5143500" type="screen16x9"/>
   <p:notesSz cx="6858000" cy="9144000"/>
   <p:embeddedFontLst>
     <p:embeddedFont>
       <p:font typeface="Montserrat" panose="00000500000000000000" pitchFamily="2" charset="0"/>
-      <p:regular r:id="rId19"/>
-      <p:bold r:id="rId20"/>
-      <p:italic r:id="rId21"/>
-      <p:boldItalic r:id="rId22"/>
+      <p:regular r:id="rId20"/>
+      <p:bold r:id="rId21"/>
+      <p:italic r:id="rId22"/>
+      <p:boldItalic r:id="rId23"/>
     </p:embeddedFont>
     <p:embeddedFont>
       <p:font typeface="Montserrat Black" panose="00000A00000000000000" pitchFamily="2" charset="0"/>
-      <p:bold r:id="rId23"/>
-      <p:boldItalic r:id="rId24"/>
+      <p:bold r:id="rId24"/>
+      <p:boldItalic r:id="rId25"/>
     </p:embeddedFont>
   </p:embeddedFontLst>
   <p:defaultTextStyle>
@@ -6550,10 +6551,10 @@
       </p:sp>
       <p:pic>
         <p:nvPicPr>
-          <p:cNvPr id="5" name="Imagen 4">
+          <p:cNvPr id="4" name="Imagen 3">
             <a:extLst>
               <a:ext uri="{FF2B5EF4-FFF2-40B4-BE49-F238E27FC236}">
-                <a16:creationId xmlns:a16="http://schemas.microsoft.com/office/drawing/2014/main" id="{F0F68E3A-A6CA-3DC7-4249-697609BE1A4F}"/>
+                <a16:creationId xmlns:a16="http://schemas.microsoft.com/office/drawing/2014/main" id="{2D8E37B5-B9EC-9879-0CC2-10FFAB20A7C7}"/>
               </a:ext>
             </a:extLst>
           </p:cNvPr>
@@ -6570,8 +6571,8 @@
         </p:blipFill>
         <p:spPr>
           <a:xfrm>
-            <a:off x="-6725" y="713298"/>
-            <a:ext cx="9144000" cy="3859779"/>
+            <a:off x="0" y="507026"/>
+            <a:ext cx="9144000" cy="4272323"/>
           </a:xfrm>
           <a:prstGeom prst="rect">
             <a:avLst/>
@@ -6656,10 +6657,10 @@
       </p:sp>
       <p:pic>
         <p:nvPicPr>
-          <p:cNvPr id="3" name="Imagen 2">
+          <p:cNvPr id="4" name="Imagen 3">
             <a:extLst>
               <a:ext uri="{FF2B5EF4-FFF2-40B4-BE49-F238E27FC236}">
-                <a16:creationId xmlns:a16="http://schemas.microsoft.com/office/drawing/2014/main" id="{9162A28F-854D-1295-3A54-D6DAF6431C3E}"/>
+                <a16:creationId xmlns:a16="http://schemas.microsoft.com/office/drawing/2014/main" id="{91077FBF-1B40-1710-2099-EBFC58BABC33}"/>
               </a:ext>
             </a:extLst>
           </p:cNvPr>
@@ -6676,8 +6677,8 @@
         </p:blipFill>
         <p:spPr>
           <a:xfrm>
-            <a:off x="0" y="1143878"/>
-            <a:ext cx="9144000" cy="2998619"/>
+            <a:off x="0" y="1000844"/>
+            <a:ext cx="9144000" cy="3284688"/>
           </a:xfrm>
           <a:prstGeom prst="rect">
             <a:avLst/>
@@ -6762,10 +6763,10 @@
       </p:sp>
       <p:pic>
         <p:nvPicPr>
-          <p:cNvPr id="4" name="Imagen 3">
+          <p:cNvPr id="5" name="Imagen 4">
             <a:extLst>
               <a:ext uri="{FF2B5EF4-FFF2-40B4-BE49-F238E27FC236}">
-                <a16:creationId xmlns:a16="http://schemas.microsoft.com/office/drawing/2014/main" id="{74A3FE22-E6E9-70FD-927E-DE3464EC88BE}"/>
+                <a16:creationId xmlns:a16="http://schemas.microsoft.com/office/drawing/2014/main" id="{B0831E63-1FA7-FE63-41D1-28CB7354BEBB}"/>
               </a:ext>
             </a:extLst>
           </p:cNvPr>
@@ -6782,8 +6783,8 @@
         </p:blipFill>
         <p:spPr>
           <a:xfrm>
-            <a:off x="-6725" y="454109"/>
-            <a:ext cx="9144000" cy="4378158"/>
+            <a:off x="0" y="911019"/>
+            <a:ext cx="9144000" cy="3464337"/>
           </a:xfrm>
           <a:prstGeom prst="rect">
             <a:avLst/>
@@ -6866,44 +6867,36 @@
           </a:p>
         </p:txBody>
       </p:sp>
-      <p:sp>
-        <p:nvSpPr>
-          <p:cNvPr id="3" name="CuadroTexto 2">
+      <p:pic>
+        <p:nvPicPr>
+          <p:cNvPr id="4" name="Imagen 3">
             <a:extLst>
               <a:ext uri="{FF2B5EF4-FFF2-40B4-BE49-F238E27FC236}">
-                <a16:creationId xmlns:a16="http://schemas.microsoft.com/office/drawing/2014/main" id="{E80C92A6-BE2B-AB10-E610-1BFED522DC9B}"/>
+                <a16:creationId xmlns:a16="http://schemas.microsoft.com/office/drawing/2014/main" id="{45C6D13A-79A1-EBA4-A1B6-5C8F7FAEE418}"/>
               </a:ext>
             </a:extLst>
           </p:cNvPr>
-          <p:cNvSpPr txBox="1"/>
+          <p:cNvPicPr>
+            <a:picLocks noChangeAspect="1"/>
+          </p:cNvPicPr>
           <p:nvPr/>
-        </p:nvSpPr>
+        </p:nvPicPr>
+        <p:blipFill>
+          <a:blip r:embed="rId2"/>
+          <a:stretch>
+            <a:fillRect/>
+          </a:stretch>
+        </p:blipFill>
         <p:spPr>
           <a:xfrm>
-            <a:off x="1699200" y="2255886"/>
-            <a:ext cx="5745600" cy="707886"/>
+            <a:off x="0" y="958226"/>
+            <a:ext cx="9144000" cy="3369924"/>
           </a:xfrm>
           <a:prstGeom prst="rect">
             <a:avLst/>
           </a:prstGeom>
-          <a:noFill/>
         </p:spPr>
-        <p:txBody>
-          <a:bodyPr wrap="square" rtlCol="0">
-            <a:spAutoFit/>
-          </a:bodyPr>
-          <a:lstStyle/>
-          <a:p>
-            <a:pPr algn="ctr"/>
-            <a:r>
-              <a:rPr lang="es-MX" sz="2000" b="1" dirty="0">
-                <a:latin typeface="Montserrat" panose="00000500000000000000" pitchFamily="2" charset="0"/>
-              </a:rPr>
-              <a:t>No se registró información del gobernador en radiodifusoras</a:t>
-            </a:r>
-          </a:p>
-        </p:txBody>
-      </p:sp>
+      </p:pic>
     </p:spTree>
     <p:extLst>
       <p:ext uri="{BB962C8B-B14F-4D97-AF65-F5344CB8AC3E}">
@@ -6982,10 +6975,10 @@
       </p:sp>
       <p:pic>
         <p:nvPicPr>
-          <p:cNvPr id="3" name="Imagen 2">
+          <p:cNvPr id="4" name="Imagen 3">
             <a:extLst>
               <a:ext uri="{FF2B5EF4-FFF2-40B4-BE49-F238E27FC236}">
-                <a16:creationId xmlns:a16="http://schemas.microsoft.com/office/drawing/2014/main" id="{B974ECA6-5001-06F4-F55F-7C3DF27C8B0A}"/>
+                <a16:creationId xmlns:a16="http://schemas.microsoft.com/office/drawing/2014/main" id="{7EBB9478-F055-6151-F825-04298F9BD9DF}"/>
               </a:ext>
             </a:extLst>
           </p:cNvPr>
@@ -7002,8 +6995,8 @@
         </p:blipFill>
         <p:spPr>
           <a:xfrm>
-            <a:off x="0" y="456690"/>
-            <a:ext cx="9144000" cy="4372996"/>
+            <a:off x="0" y="463717"/>
+            <a:ext cx="9144000" cy="4475265"/>
           </a:xfrm>
           <a:prstGeom prst="rect">
             <a:avLst/>
@@ -7024,6 +7017,118 @@
 </file>
 
 <file path=ppt/slides/slide15.xml><?xml version="1.0" encoding="utf-8"?>
+<p:sld xmlns:a="http://schemas.openxmlformats.org/drawingml/2006/main" xmlns:r="http://schemas.openxmlformats.org/officeDocument/2006/relationships" xmlns:p="http://schemas.openxmlformats.org/presentationml/2006/main">
+  <p:cSld>
+    <p:bg>
+      <p:bgPr>
+        <a:solidFill>
+          <a:srgbClr val="F8F9FA"/>
+        </a:solidFill>
+        <a:effectLst/>
+      </p:bgPr>
+    </p:bg>
+    <p:spTree>
+      <p:nvGrpSpPr>
+        <p:cNvPr id="1" name="">
+          <a:extLst>
+            <a:ext uri="{FF2B5EF4-FFF2-40B4-BE49-F238E27FC236}">
+              <a16:creationId xmlns:a16="http://schemas.microsoft.com/office/drawing/2014/main" id="{91E945C0-F70E-13C6-898F-1A7B2C284705}"/>
+            </a:ext>
+          </a:extLst>
+        </p:cNvPr>
+        <p:cNvGrpSpPr/>
+        <p:nvPr/>
+      </p:nvGrpSpPr>
+      <p:grpSpPr>
+        <a:xfrm>
+          <a:off x="0" y="0"/>
+          <a:ext cx="0" cy="0"/>
+          <a:chOff x="0" y="0"/>
+          <a:chExt cx="0" cy="0"/>
+        </a:xfrm>
+      </p:grpSpPr>
+      <p:sp>
+        <p:nvSpPr>
+          <p:cNvPr id="6" name="CuadroTexto 5">
+            <a:extLst>
+              <a:ext uri="{FF2B5EF4-FFF2-40B4-BE49-F238E27FC236}">
+                <a16:creationId xmlns:a16="http://schemas.microsoft.com/office/drawing/2014/main" id="{A2BE0C88-EC1D-CCB4-1CC7-50C27412A870}"/>
+              </a:ext>
+            </a:extLst>
+          </p:cNvPr>
+          <p:cNvSpPr txBox="1"/>
+          <p:nvPr/>
+        </p:nvSpPr>
+        <p:spPr>
+          <a:xfrm>
+            <a:off x="1926166" y="88135"/>
+            <a:ext cx="5291667" cy="307777"/>
+          </a:xfrm>
+          <a:prstGeom prst="rect">
+            <a:avLst/>
+          </a:prstGeom>
+          <a:noFill/>
+        </p:spPr>
+        <p:txBody>
+          <a:bodyPr wrap="square" rtlCol="0">
+            <a:spAutoFit/>
+          </a:bodyPr>
+          <a:lstStyle/>
+          <a:p>
+            <a:pPr algn="ctr"/>
+            <a:r>
+              <a:rPr lang="es-MX" b="1" dirty="0">
+                <a:latin typeface="Montserrat" pitchFamily="2" charset="0"/>
+              </a:rPr>
+              <a:t>Temas de gobierno por radiodifusora</a:t>
+            </a:r>
+          </a:p>
+        </p:txBody>
+      </p:sp>
+      <p:pic>
+        <p:nvPicPr>
+          <p:cNvPr id="2" name="Imagen 1">
+            <a:extLst>
+              <a:ext uri="{FF2B5EF4-FFF2-40B4-BE49-F238E27FC236}">
+                <a16:creationId xmlns:a16="http://schemas.microsoft.com/office/drawing/2014/main" id="{16696B9A-1A9E-864A-E939-0E4E1011E90E}"/>
+              </a:ext>
+            </a:extLst>
+          </p:cNvPr>
+          <p:cNvPicPr>
+            <a:picLocks noChangeAspect="1"/>
+          </p:cNvPicPr>
+          <p:nvPr/>
+        </p:nvPicPr>
+        <p:blipFill>
+          <a:blip r:embed="rId2"/>
+          <a:stretch>
+            <a:fillRect/>
+          </a:stretch>
+        </p:blipFill>
+        <p:spPr>
+          <a:xfrm>
+            <a:off x="2000249" y="933450"/>
+            <a:ext cx="5143500" cy="3419475"/>
+          </a:xfrm>
+          <a:prstGeom prst="rect">
+            <a:avLst/>
+          </a:prstGeom>
+        </p:spPr>
+      </p:pic>
+    </p:spTree>
+    <p:extLst>
+      <p:ext uri="{BB962C8B-B14F-4D97-AF65-F5344CB8AC3E}">
+        <p14:creationId xmlns:p14="http://schemas.microsoft.com/office/powerpoint/2010/main" val="2812700958"/>
+      </p:ext>
+    </p:extLst>
+  </p:cSld>
+  <p:clrMapOvr>
+    <a:masterClrMapping/>
+  </p:clrMapOvr>
+</p:sld>
+</file>
+
+<file path=ppt/slides/slide16.xml><?xml version="1.0" encoding="utf-8"?>
 <p:sld xmlns:a="http://schemas.openxmlformats.org/drawingml/2006/main" xmlns:r="http://schemas.openxmlformats.org/officeDocument/2006/relationships" xmlns:p="http://schemas.openxmlformats.org/presentationml/2006/main">
   <p:cSld>
     <p:bg>
@@ -7094,10 +7199,10 @@
       </p:sp>
       <p:pic>
         <p:nvPicPr>
-          <p:cNvPr id="3" name="Imagen 2">
+          <p:cNvPr id="4" name="Imagen 3">
             <a:extLst>
               <a:ext uri="{FF2B5EF4-FFF2-40B4-BE49-F238E27FC236}">
-                <a16:creationId xmlns:a16="http://schemas.microsoft.com/office/drawing/2014/main" id="{D6174850-78E0-1780-3001-E6CE0D9C8A08}"/>
+                <a16:creationId xmlns:a16="http://schemas.microsoft.com/office/drawing/2014/main" id="{B2BAE8A6-46A0-43EF-0C5D-666D7BB24B0B}"/>
               </a:ext>
             </a:extLst>
           </p:cNvPr>
@@ -7114,8 +7219,8 @@
         </p:blipFill>
         <p:spPr>
           <a:xfrm>
-            <a:off x="1666874" y="704850"/>
-            <a:ext cx="5810250" cy="4438650"/>
+            <a:off x="3128962" y="728662"/>
+            <a:ext cx="2886075" cy="3686175"/>
           </a:xfrm>
           <a:prstGeom prst="rect">
             <a:avLst/>
@@ -7135,7 +7240,7 @@
 </p:sld>
 </file>
 
-<file path=ppt/slides/slide16.xml><?xml version="1.0" encoding="utf-8"?>
+<file path=ppt/slides/slide17.xml><?xml version="1.0" encoding="utf-8"?>
 <p:sld xmlns:a="http://schemas.openxmlformats.org/drawingml/2006/main" xmlns:r="http://schemas.openxmlformats.org/officeDocument/2006/relationships" xmlns:p="http://schemas.openxmlformats.org/presentationml/2006/main">
   <p:cSld>
     <p:spTree>
